--- a/Slides/Day-10/Python Scripting for Networking - Day 10.pptx
+++ b/Slides/Day-10/Python Scripting for Networking - Day 10.pptx
@@ -9,11 +9,10 @@
     <p:sldId id="257" r:id="rId3"/>
     <p:sldId id="299" r:id="rId4"/>
     <p:sldId id="292" r:id="rId5"/>
-    <p:sldId id="295" r:id="rId6"/>
-    <p:sldId id="296" r:id="rId7"/>
-    <p:sldId id="297" r:id="rId8"/>
-    <p:sldId id="300" r:id="rId9"/>
-    <p:sldId id="280" r:id="rId10"/>
+    <p:sldId id="301" r:id="rId6"/>
+    <p:sldId id="295" r:id="rId7"/>
+    <p:sldId id="296" r:id="rId8"/>
+    <p:sldId id="280" r:id="rId9"/>
   </p:sldIdLst>
   <p:sldSz cx="12192000" cy="6858000"/>
   <p:notesSz cx="6858000" cy="9144000"/>
@@ -249,7 +248,7 @@
           <a:p>
             <a:fld id="{D1D1EADE-8E88-4C7C-8AC5-FB148DE4940E}" type="datetime1">
               <a:rPr lang="en-US" smtClean="0"/>
-              <a:t>6/3/2026</a:t>
+              <a:t>7/16/2026</a:t>
             </a:fld>
             <a:endParaRPr lang="en-US"/>
           </a:p>
@@ -417,7 +416,7 @@
           <a:p>
             <a:fld id="{EC3C8B9C-477D-492A-96AD-1FC2CC997A73}" type="datetime1">
               <a:rPr lang="en-US" smtClean="0"/>
-              <a:t>6/3/2026</a:t>
+              <a:t>7/16/2026</a:t>
             </a:fld>
             <a:endParaRPr lang="en-US"/>
           </a:p>
@@ -595,7 +594,7 @@
           <a:p>
             <a:fld id="{42D3AED5-E26D-4E29-B1B3-7847B6779594}" type="datetime1">
               <a:rPr lang="en-US" smtClean="0"/>
-              <a:t>6/3/2026</a:t>
+              <a:t>7/16/2026</a:t>
             </a:fld>
             <a:endParaRPr lang="en-US"/>
           </a:p>
@@ -763,7 +762,7 @@
           <a:p>
             <a:fld id="{157B6794-849E-4626-908B-D15793550EFB}" type="datetime1">
               <a:rPr lang="en-US" smtClean="0"/>
-              <a:t>6/3/2026</a:t>
+              <a:t>7/16/2026</a:t>
             </a:fld>
             <a:endParaRPr lang="en-US"/>
           </a:p>
@@ -1008,7 +1007,7 @@
           <a:p>
             <a:fld id="{63DB64E7-5594-42A3-ADBF-E95A7ACEAD64}" type="datetime1">
               <a:rPr lang="en-US" smtClean="0"/>
-              <a:t>6/3/2026</a:t>
+              <a:t>7/16/2026</a:t>
             </a:fld>
             <a:endParaRPr lang="en-US"/>
           </a:p>
@@ -1237,7 +1236,7 @@
           <a:p>
             <a:fld id="{18462B0B-D248-4FFB-8695-AD7FA4B1284A}" type="datetime1">
               <a:rPr lang="en-US" smtClean="0"/>
-              <a:t>6/3/2026</a:t>
+              <a:t>7/16/2026</a:t>
             </a:fld>
             <a:endParaRPr lang="en-US"/>
           </a:p>
@@ -1601,7 +1600,7 @@
           <a:p>
             <a:fld id="{D0378EFB-9159-4510-B73F-4F0409ADE937}" type="datetime1">
               <a:rPr lang="en-US" smtClean="0"/>
-              <a:t>6/3/2026</a:t>
+              <a:t>7/16/2026</a:t>
             </a:fld>
             <a:endParaRPr lang="en-US"/>
           </a:p>
@@ -1718,7 +1717,7 @@
           <a:p>
             <a:fld id="{89BC9412-2452-4BED-A324-9D8C115361AD}" type="datetime1">
               <a:rPr lang="en-US" smtClean="0"/>
-              <a:t>6/3/2026</a:t>
+              <a:t>7/16/2026</a:t>
             </a:fld>
             <a:endParaRPr lang="en-US"/>
           </a:p>
@@ -1813,7 +1812,7 @@
           <a:p>
             <a:fld id="{F5318F62-D251-40E8-A23C-F4CFE9FEAB41}" type="datetime1">
               <a:rPr lang="en-US" smtClean="0"/>
-              <a:t>6/3/2026</a:t>
+              <a:t>7/16/2026</a:t>
             </a:fld>
             <a:endParaRPr lang="en-US"/>
           </a:p>
@@ -2088,7 +2087,7 @@
           <a:p>
             <a:fld id="{44F76144-149E-4874-93A5-554A0357CF82}" type="datetime1">
               <a:rPr lang="en-US" smtClean="0"/>
-              <a:t>6/3/2026</a:t>
+              <a:t>7/16/2026</a:t>
             </a:fld>
             <a:endParaRPr lang="en-US"/>
           </a:p>
@@ -2343,7 +2342,7 @@
           <a:p>
             <a:fld id="{50BA65D8-0540-4835-AE5C-25D29DBA01BE}" type="datetime1">
               <a:rPr lang="en-US" smtClean="0"/>
-              <a:t>6/3/2026</a:t>
+              <a:t>7/16/2026</a:t>
             </a:fld>
             <a:endParaRPr lang="en-US"/>
           </a:p>
@@ -2554,7 +2553,7 @@
           <a:p>
             <a:fld id="{E31BA835-12AC-4E8F-955A-EA3F4DE2791F}" type="datetime1">
               <a:rPr lang="en-US" smtClean="0"/>
-              <a:t>6/3/2026</a:t>
+              <a:t>7/16/2026</a:t>
             </a:fld>
             <a:endParaRPr lang="en-US"/>
           </a:p>
@@ -6153,7 +6152,7 @@
                 <a:ea typeface="Calibri" panose="020F0502020204030204"/>
                 <a:cs typeface="Calibri" panose="020F0502020204030204"/>
               </a:rPr>
-              <a:t>Python Network Controllers</a:t>
+              <a:t>Network Monitoring Automation</a:t>
             </a:r>
           </a:p>
           <a:p>
@@ -6162,7 +6161,7 @@
                 <a:ea typeface="Calibri" panose="020F0502020204030204"/>
                 <a:cs typeface="Calibri" panose="020F0502020204030204"/>
               </a:rPr>
-              <a:t>Python Classes </a:t>
+              <a:t>Working with Ansible</a:t>
             </a:r>
           </a:p>
           <a:p>
@@ -6171,7 +6170,7 @@
                 <a:ea typeface="Calibri" panose="020F0502020204030204"/>
                 <a:cs typeface="Calibri" panose="020F0502020204030204"/>
               </a:rPr>
-              <a:t>Python Packages </a:t>
+              <a:t>YAML based automation</a:t>
             </a:r>
           </a:p>
           <a:p>
@@ -6180,44 +6179,16 @@
                 <a:ea typeface="Calibri" panose="020F0502020204030204"/>
                 <a:cs typeface="Calibri" panose="020F0502020204030204"/>
               </a:rPr>
-              <a:t>Python </a:t>
-            </a:r>
-            <a:r>
-              <a:rPr lang="en-US" sz="2200" dirty="0" err="1">
-                <a:ea typeface="Calibri" panose="020F0502020204030204"/>
-                <a:cs typeface="Calibri" panose="020F0502020204030204"/>
-              </a:rPr>
-              <a:t>Netmiko</a:t>
-            </a:r>
+              <a:t>Python JINJA library</a:t>
+            </a:r>
+          </a:p>
+          <a:p>
             <a:r>
               <a:rPr lang="en-US" sz="2200" dirty="0">
                 <a:ea typeface="Calibri" panose="020F0502020204030204"/>
                 <a:cs typeface="Calibri" panose="020F0502020204030204"/>
               </a:rPr>
-              <a:t> Library</a:t>
-            </a:r>
-          </a:p>
-          <a:p>
-            <a:r>
-              <a:rPr lang="en-US" sz="2200" dirty="0">
-                <a:ea typeface="Calibri" panose="020F0502020204030204"/>
-                <a:cs typeface="Calibri" panose="020F0502020204030204"/>
-              </a:rPr>
-              <a:t>Python </a:t>
-            </a:r>
-            <a:r>
-              <a:rPr lang="en-US" sz="2200" dirty="0" err="1">
-                <a:ea typeface="Calibri" panose="020F0502020204030204"/>
-                <a:cs typeface="Calibri" panose="020F0502020204030204"/>
-              </a:rPr>
-              <a:t>Nornir</a:t>
-            </a:r>
-            <a:r>
-              <a:rPr lang="en-US" sz="2200" dirty="0">
-                <a:ea typeface="Calibri" panose="020F0502020204030204"/>
-                <a:cs typeface="Calibri" panose="020F0502020204030204"/>
-              </a:rPr>
-              <a:t> Library</a:t>
+              <a:t>Python NAPALM Library</a:t>
             </a:r>
           </a:p>
           <a:p>
@@ -6315,7 +6286,13 @@
           <a:p>
             <a:r>
               <a:rPr lang="en-US" sz="2000" dirty="0"/>
-              <a:t>A Python network controller is typically a Software-Defined Networking (SDN) framework or an automation engine written in Python that centralizes the management of network switches, routers, and firewalls. </a:t>
+              <a:t>Python network monitoring automation allows engineers to track device availability, gather performance metrics, and alert teams to anomalies without human intervention.</a:t>
+            </a:r>
+          </a:p>
+          <a:p>
+            <a:r>
+              <a:rPr lang="en-US" sz="2000" dirty="0"/>
+              <a:t> By combining structured scripting with purpose-built networking libraries, you can transition from manual CLI checks to programmatic, proactive management. </a:t>
             </a:r>
           </a:p>
           <a:p>
@@ -6323,8 +6300,42 @@
           </a:p>
           <a:p>
             <a:r>
+              <a:rPr lang="en-US" b="1" dirty="0"/>
+              <a:t>NAPALM</a:t>
+            </a:r>
+            <a:r>
               <a:rPr lang="en-US" sz="2000" dirty="0"/>
-              <a:t>It separates the control plane from the data plane, allowing engineers to programmatically dictate traffic, optimize routing, and manage devices. </a:t>
+              <a:t>: Implements a unified, vendor-agnostic API for cross-platform data collection.</a:t>
+            </a:r>
+          </a:p>
+          <a:p>
+            <a:r>
+              <a:rPr lang="en-US" b="1" dirty="0" err="1"/>
+              <a:t>Nornir</a:t>
+            </a:r>
+            <a:r>
+              <a:rPr lang="en-US" sz="2000" dirty="0"/>
+              <a:t>: Functions as a pluggable multi-threaded framework to manage vast device inventories simultaneously.</a:t>
+            </a:r>
+          </a:p>
+          <a:p>
+            <a:r>
+              <a:rPr lang="en-US" b="1" dirty="0" err="1"/>
+              <a:t>Scapy</a:t>
+            </a:r>
+            <a:r>
+              <a:rPr lang="en-US" sz="2000" dirty="0"/>
+              <a:t>: Offers advanced packet manipulation and real-time deep packet analysis.</a:t>
+            </a:r>
+          </a:p>
+          <a:p>
+            <a:r>
+              <a:rPr lang="en-US" b="1" dirty="0" err="1"/>
+              <a:t>NCClient</a:t>
+            </a:r>
+            <a:r>
+              <a:rPr lang="en-US" sz="2000" dirty="0"/>
+              <a:t>: Handles client-side scripting for XML-based NETCONF APIs on modern switches.</a:t>
             </a:r>
           </a:p>
         </p:txBody>
@@ -6382,7 +6393,7 @@
           <a:p>
             <a:r>
               <a:rPr lang="en-US" dirty="0"/>
-              <a:t>Python Classes</a:t>
+              <a:t>Working with Ansible</a:t>
             </a:r>
           </a:p>
         </p:txBody>
@@ -6412,24 +6423,66 @@
           <a:p>
             <a:r>
               <a:rPr lang="en-US" sz="2000" dirty="0"/>
-              <a:t>Classes are created using class keyword. Attributes are variables defined inside class and represent properties of the class. Attributes can be accessed using dot . operator (e.g., </a:t>
-            </a:r>
-            <a:r>
-              <a:rPr lang="en-US" sz="2000" dirty="0" err="1"/>
-              <a:t>MyClass.my_attribute</a:t>
-            </a:r>
+              <a:t>Ansible is an open-source IT automation engine written entirely in Python that uses declarative YAML files (Playbooks) to manage configurations, deploy software, and orchestrate infrastructure.</a:t>
+            </a:r>
+          </a:p>
+          <a:p>
+            <a:endParaRPr lang="en-US" sz="2000" dirty="0"/>
+          </a:p>
+          <a:p>
+            <a:r>
+              <a:rPr lang="en-US" sz="2000" b="1" dirty="0"/>
+              <a:t>How Python and Ansible Interact</a:t>
+            </a:r>
+          </a:p>
+          <a:p>
             <a:r>
               <a:rPr lang="en-US" sz="2000" dirty="0"/>
-              <a:t>).</a:t>
-            </a:r>
-          </a:p>
-          <a:p>
-            <a:endParaRPr lang="en-US" sz="2000" dirty="0"/>
+              <a:t>The Engine: Ansible runs on Python. It converts your YAML playbook tasks into small Python scripts behind the scenes.</a:t>
+            </a:r>
           </a:p>
           <a:p>
             <a:r>
               <a:rPr lang="en-US" sz="2000" dirty="0"/>
-              <a:t>An object is a specific instance of a class. It holds its own set of data (instance variables) and can invoke methods defined by its class. Multiple objects can be created from same class, each with its own unique attributes.</a:t>
+              <a:t>The Control Node: The machine executing the commands requires a modern version of </a:t>
+            </a:r>
+            <a:r>
+              <a:rPr lang="en-US" sz="2000" dirty="0">
+                <a:hlinkClick r:id="rId2">
+                  <a:extLst>
+                    <a:ext uri="{A12FA001-AC4F-418D-AE19-62706E023703}">
+                      <ahyp:hlinkClr xmlns:ahyp="http://schemas.microsoft.com/office/drawing/2018/hyperlinkcolor" val="tx"/>
+                    </a:ext>
+                  </a:extLst>
+                </a:hlinkClick>
+              </a:rPr>
+              <a:t>Ansible and Python 3</a:t>
+            </a:r>
+            <a:r>
+              <a:rPr lang="en-US" sz="2000" dirty="0"/>
+              <a:t>.</a:t>
+            </a:r>
+          </a:p>
+          <a:p>
+            <a:r>
+              <a:rPr lang="en-US" sz="2000" dirty="0"/>
+              <a:t>The Managed Nodes: The target servers do not need Ansible installed, but they must have a </a:t>
+            </a:r>
+            <a:r>
+              <a:rPr lang="en-US" sz="2000" dirty="0">
+                <a:hlinkClick r:id="rId3">
+                  <a:extLst>
+                    <a:ext uri="{A12FA001-AC4F-418D-AE19-62706E023703}">
+                      <ahyp:hlinkClr xmlns:ahyp="http://schemas.microsoft.com/office/drawing/2018/hyperlinkcolor" val="tx"/>
+                    </a:ext>
+                  </a:extLst>
+                </a:hlinkClick>
+              </a:rPr>
+              <a:t>Python interpreter</a:t>
+            </a:r>
+            <a:r>
+              <a:rPr lang="en-US" sz="2000" dirty="0"/>
+              <a:t> to execute the pushed scripts. </a:t>
             </a:r>
           </a:p>
         </p:txBody>
@@ -6469,7 +6522,7 @@
           <p:cNvPr id="2" name="Title 1">
             <a:extLst>
               <a:ext uri="{FF2B5EF4-FFF2-40B4-BE49-F238E27FC236}">
-                <a16:creationId xmlns:a16="http://schemas.microsoft.com/office/drawing/2014/main" id="{EE312A29-C420-F6C7-43D0-DC774B32144E}"/>
+                <a16:creationId xmlns:a16="http://schemas.microsoft.com/office/drawing/2014/main" id="{426D6AC8-723B-3926-2296-F10BC356E987}"/>
               </a:ext>
             </a:extLst>
           </p:cNvPr>
@@ -6487,82 +6540,57 @@
           <a:p>
             <a:r>
               <a:rPr lang="en-US" dirty="0"/>
-              <a:t>Python Packages</a:t>
-            </a:r>
-          </a:p>
-        </p:txBody>
-      </p:sp>
-      <p:sp>
-        <p:nvSpPr>
-          <p:cNvPr id="3" name="Content Placeholder 2">
+              <a:t>Python V/s Ansible Automation</a:t>
+            </a:r>
+          </a:p>
+        </p:txBody>
+      </p:sp>
+      <p:pic>
+        <p:nvPicPr>
+          <p:cNvPr id="5" name="Content Placeholder 4">
             <a:extLst>
               <a:ext uri="{FF2B5EF4-FFF2-40B4-BE49-F238E27FC236}">
-                <a16:creationId xmlns:a16="http://schemas.microsoft.com/office/drawing/2014/main" id="{2ED93877-5179-34CD-7DDD-34FABB0EB579}"/>
+                <a16:creationId xmlns:a16="http://schemas.microsoft.com/office/drawing/2014/main" id="{17886D20-BB1E-84E9-77B0-8AADD854E1A4}"/>
               </a:ext>
             </a:extLst>
           </p:cNvPr>
-          <p:cNvSpPr>
-            <a:spLocks noGrp="1"/>
-          </p:cNvSpPr>
+          <p:cNvPicPr>
+            <a:picLocks noGrp="1" noChangeAspect="1"/>
+          </p:cNvPicPr>
           <p:nvPr>
             <p:ph idx="1"/>
           </p:nvPr>
-        </p:nvSpPr>
-        <p:spPr/>
-        <p:txBody>
-          <a:bodyPr>
-            <a:normAutofit/>
-          </a:bodyPr>
-          <a:lstStyle/>
-          <a:p>
-            <a:r>
-              <a:rPr lang="en-US" sz="2200" dirty="0"/>
-              <a:t>If you are working with physical hardware (switches, routers) or infrastructure, these packages streamline device communication, configuration, and testing. </a:t>
-            </a:r>
-          </a:p>
-          <a:p>
-            <a:r>
-              <a:rPr lang="en-US" sz="2200" dirty="0" err="1"/>
-              <a:t>Netmiko</a:t>
-            </a:r>
-            <a:r>
-              <a:rPr lang="en-US" sz="2200" dirty="0"/>
-              <a:t>: A multi-vendor library built on </a:t>
-            </a:r>
-            <a:r>
-              <a:rPr lang="en-US" sz="2200" dirty="0" err="1"/>
-              <a:t>Paramiko</a:t>
-            </a:r>
-            <a:r>
-              <a:rPr lang="en-US" sz="2200" dirty="0"/>
-              <a:t> that simplifies SSH connections to network devices, allowing you to easily send CLI commands and retrieve outputs. </a:t>
-            </a:r>
-          </a:p>
-          <a:p>
-            <a:r>
-              <a:rPr lang="en-US" sz="2200" dirty="0"/>
-              <a:t>NAPALM: An abstraction layer that lets you interact with different networking vendors (Cisco, Juniper, Arista) using a single, uniform API. </a:t>
-            </a:r>
-          </a:p>
-          <a:p>
-            <a:r>
-              <a:rPr lang="en-US" sz="2200" dirty="0" err="1"/>
-              <a:t>Nornir</a:t>
-            </a:r>
-            <a:r>
-              <a:rPr lang="en-US" sz="2200" dirty="0"/>
-              <a:t>: An automation framework written specifically for network engineers that allows you to run tasks concurrently against hundreds of devices.</a:t>
-            </a:r>
-          </a:p>
-          <a:p>
-            <a:endParaRPr lang="en-US" sz="2100" dirty="0"/>
-          </a:p>
-        </p:txBody>
-      </p:sp>
+        </p:nvPicPr>
+        <p:blipFill>
+          <a:blip r:embed="rId2"/>
+          <a:stretch>
+            <a:fillRect/>
+          </a:stretch>
+        </p:blipFill>
+        <p:spPr>
+          <a:xfrm>
+            <a:off x="2550702" y="1937595"/>
+            <a:ext cx="6622533" cy="3666792"/>
+          </a:xfrm>
+          <a:prstGeom prst="rect">
+            <a:avLst/>
+          </a:prstGeom>
+          <a:ln>
+            <a:noFill/>
+          </a:ln>
+          <a:effectLst>
+            <a:outerShdw blurRad="292100" dist="139700" dir="2700000" algn="tl" rotWithShape="0">
+              <a:srgbClr val="333333">
+                <a:alpha val="65000"/>
+              </a:srgbClr>
+            </a:outerShdw>
+          </a:effectLst>
+        </p:spPr>
+      </p:pic>
     </p:spTree>
     <p:extLst>
       <p:ext uri="{BB962C8B-B14F-4D97-AF65-F5344CB8AC3E}">
-        <p14:creationId xmlns:p14="http://schemas.microsoft.com/office/powerpoint/2010/main" val="1969476680"/>
+        <p14:creationId xmlns:p14="http://schemas.microsoft.com/office/powerpoint/2010/main" val="4200769045"/>
       </p:ext>
     </p:extLst>
   </p:cSld>
@@ -6594,7 +6622,7 @@
           <p:cNvPr id="2" name="Title 1">
             <a:extLst>
               <a:ext uri="{FF2B5EF4-FFF2-40B4-BE49-F238E27FC236}">
-                <a16:creationId xmlns:a16="http://schemas.microsoft.com/office/drawing/2014/main" id="{67200482-3FE5-B16A-5B3E-2690F27C2696}"/>
+                <a16:creationId xmlns:a16="http://schemas.microsoft.com/office/drawing/2014/main" id="{EE312A29-C420-F6C7-43D0-DC774B32144E}"/>
               </a:ext>
             </a:extLst>
           </p:cNvPr>
@@ -6612,158 +6640,126 @@
           <a:p>
             <a:r>
               <a:rPr lang="en-US" dirty="0"/>
-              <a:t>Python </a:t>
-            </a:r>
-            <a:r>
-              <a:rPr lang="en-US" dirty="0" err="1"/>
-              <a:t>NetworkX</a:t>
-            </a:r>
-            <a:r>
-              <a:rPr lang="en-US" dirty="0"/>
-              <a:t> library </a:t>
-            </a:r>
-          </a:p>
-        </p:txBody>
-      </p:sp>
-      <p:sp>
-        <p:nvSpPr>
-          <p:cNvPr id="6" name="TextBox 5">
+              <a:t>Python JINJA library</a:t>
+            </a:r>
+          </a:p>
+        </p:txBody>
+      </p:sp>
+      <p:sp>
+        <p:nvSpPr>
+          <p:cNvPr id="3" name="Content Placeholder 2">
             <a:extLst>
               <a:ext uri="{FF2B5EF4-FFF2-40B4-BE49-F238E27FC236}">
-                <a16:creationId xmlns:a16="http://schemas.microsoft.com/office/drawing/2014/main" id="{AAEC8C3B-3BD2-4945-0E11-DA5756D57CAE}"/>
+                <a16:creationId xmlns:a16="http://schemas.microsoft.com/office/drawing/2014/main" id="{2ED93877-5179-34CD-7DDD-34FABB0EB579}"/>
               </a:ext>
             </a:extLst>
           </p:cNvPr>
-          <p:cNvSpPr txBox="1"/>
-          <p:nvPr/>
-        </p:nvSpPr>
-        <p:spPr>
-          <a:xfrm>
-            <a:off x="720213" y="1891032"/>
-            <a:ext cx="9955161" cy="3724096"/>
-          </a:xfrm>
-          <a:prstGeom prst="rect">
-            <a:avLst/>
-          </a:prstGeom>
-          <a:noFill/>
-        </p:spPr>
-        <p:txBody>
-          <a:bodyPr wrap="square" rtlCol="0">
-            <a:spAutoFit/>
+          <p:cNvSpPr>
+            <a:spLocks noGrp="1"/>
+          </p:cNvSpPr>
+          <p:nvPr>
+            <p:ph idx="1"/>
+          </p:nvPr>
+        </p:nvSpPr>
+        <p:spPr/>
+        <p:txBody>
+          <a:bodyPr>
+            <a:normAutofit/>
           </a:bodyPr>
           <a:lstStyle/>
           <a:p>
-            <a:pPr marL="285750" indent="-285750">
-              <a:buFont typeface="Arial" panose="020B0604020202020204" pitchFamily="34" charset="0"/>
-              <a:buChar char="•"/>
-            </a:pPr>
-            <a:r>
-              <a:rPr lang="en-US" dirty="0" err="1"/>
-              <a:t>NetworkX</a:t>
-            </a:r>
-            <a:r>
-              <a:rPr lang="en-US" dirty="0"/>
-              <a:t> is a Python package for the creation, manipulation, and study of the structure, dynamics, and functions of complex networks. It provides:</a:t>
-            </a:r>
-          </a:p>
-          <a:p>
-            <a:pPr marL="285750" indent="-285750">
-              <a:buFont typeface="Arial" panose="020B0604020202020204" pitchFamily="34" charset="0"/>
-              <a:buChar char="•"/>
-            </a:pPr>
-            <a:r>
-              <a:rPr lang="en-US" dirty="0"/>
-              <a:t>tools for the study of the structure and dynamics of social, biological, and infrastructure networks;</a:t>
-            </a:r>
-          </a:p>
-          <a:p>
-            <a:pPr marL="285750" indent="-285750">
-              <a:buFont typeface="Arial" panose="020B0604020202020204" pitchFamily="34" charset="0"/>
-              <a:buChar char="•"/>
-            </a:pPr>
-            <a:r>
-              <a:rPr lang="en-US" dirty="0"/>
-              <a:t>a standard programming interface and graph implementation that is suitable for many applications;</a:t>
-            </a:r>
-          </a:p>
-          <a:p>
-            <a:pPr marL="285750" indent="-285750">
-              <a:buFont typeface="Arial" panose="020B0604020202020204" pitchFamily="34" charset="0"/>
-              <a:buChar char="•"/>
-            </a:pPr>
-            <a:r>
-              <a:rPr lang="en-US" dirty="0"/>
-              <a:t>a rapid development environment for collaborative, multidisciplinary projects;</a:t>
-            </a:r>
-          </a:p>
-          <a:p>
-            <a:pPr marL="285750" indent="-285750">
-              <a:buFont typeface="Arial" panose="020B0604020202020204" pitchFamily="34" charset="0"/>
-              <a:buChar char="•"/>
-            </a:pPr>
-            <a:r>
-              <a:rPr lang="en-US" dirty="0"/>
-              <a:t>support for algorithm acceleration and additional features through third-party backends;</a:t>
-            </a:r>
-          </a:p>
-          <a:p>
-            <a:pPr marL="285750" indent="-285750">
-              <a:buFont typeface="Arial" panose="020B0604020202020204" pitchFamily="34" charset="0"/>
-              <a:buChar char="•"/>
-            </a:pPr>
-            <a:r>
-              <a:rPr lang="en-US" dirty="0"/>
-              <a:t>an interface to existing numerical algorithms and code written in C, C++, and FORTRAN; and</a:t>
-            </a:r>
-          </a:p>
-          <a:p>
-            <a:pPr marL="285750" indent="-285750">
-              <a:buFont typeface="Arial" panose="020B0604020202020204" pitchFamily="34" charset="0"/>
-              <a:buChar char="•"/>
-            </a:pPr>
-            <a:r>
-              <a:rPr lang="en-US" dirty="0"/>
-              <a:t>the ability to painlessly work with large nonstandard data sets.</a:t>
-            </a:r>
-          </a:p>
-          <a:p>
-            <a:pPr marL="285750" indent="-285750">
-              <a:buFont typeface="Arial" panose="020B0604020202020204" pitchFamily="34" charset="0"/>
-              <a:buChar char="•"/>
-            </a:pPr>
-            <a:r>
-              <a:rPr lang="en-US" dirty="0"/>
-              <a:t>With </a:t>
-            </a:r>
-            <a:r>
-              <a:rPr lang="en-US" dirty="0" err="1"/>
-              <a:t>NetworkX</a:t>
-            </a:r>
-            <a:r>
-              <a:rPr lang="en-US" dirty="0"/>
-              <a:t> you can load and store networks in standard and nonstandard data formats, generate many types of random and classic networks, analyze network structure, build network models, design new network algorithms, draw networks, and much more.</a:t>
-            </a:r>
-          </a:p>
-          <a:p>
-            <a:pPr marL="342900" indent="-342900">
-              <a:buFont typeface="Arial" panose="020B0604020202020204" pitchFamily="34" charset="0"/>
-              <a:buChar char="•"/>
-            </a:pPr>
-            <a:endParaRPr lang="en-US" sz="1900" dirty="0"/>
-          </a:p>
-          <a:p>
-            <a:pPr marL="342900" indent="-342900">
-              <a:buFont typeface="Arial" panose="020B0604020202020204" pitchFamily="34" charset="0"/>
-              <a:buChar char="•"/>
-            </a:pPr>
-            <a:endParaRPr lang="en-US" sz="1900" dirty="0"/>
+            <a:r>
+              <a:rPr lang="en-US" sz="1800" dirty="0">
+                <a:hlinkClick r:id="rId2"/>
+              </a:rPr>
+              <a:t>Jinja</a:t>
+            </a:r>
+            <a:r>
+              <a:rPr lang="en-US" sz="1800" dirty="0"/>
+              <a:t> is a fast, expressive, and highly extensible templating engine for Python. It allows you to generate dynamic HTML, XML, CSV, or plain text configuration files by combining raw text with special placeholders and programming logic. It is widely used in frameworks like Flask, </a:t>
+            </a:r>
+            <a:r>
+              <a:rPr lang="en-US" sz="1800" dirty="0" err="1"/>
+              <a:t>FastAPI</a:t>
+            </a:r>
+            <a:r>
+              <a:rPr lang="en-US" sz="1800" dirty="0"/>
+              <a:t>, and automation platforms like Ansible and </a:t>
+            </a:r>
+            <a:r>
+              <a:rPr lang="en-US" sz="1800" dirty="0" err="1"/>
+              <a:t>dbt</a:t>
+            </a:r>
+            <a:r>
+              <a:rPr lang="en-US" sz="2400" dirty="0"/>
+              <a:t>. </a:t>
+            </a:r>
+          </a:p>
+          <a:p>
+            <a:endParaRPr lang="en-US" sz="2400" dirty="0"/>
+          </a:p>
+          <a:p>
+            <a:r>
+              <a:rPr lang="en-US" sz="1800" dirty="0"/>
+              <a:t>{{ ... }}: </a:t>
+            </a:r>
+            <a:r>
+              <a:rPr lang="en-US" sz="1800" b="1" dirty="0"/>
+              <a:t>Expressions</a:t>
+            </a:r>
+            <a:r>
+              <a:rPr lang="en-US" sz="1800" dirty="0"/>
+              <a:t> to print directly to the template output.</a:t>
+            </a:r>
+          </a:p>
+          <a:p>
+            <a:r>
+              <a:rPr lang="en-US" sz="1800" dirty="0"/>
+              <a:t>{% ... %}: </a:t>
+            </a:r>
+            <a:r>
+              <a:rPr lang="en-US" sz="1800" b="1" dirty="0"/>
+              <a:t>Statements</a:t>
+            </a:r>
+            <a:r>
+              <a:rPr lang="en-US" sz="1800" dirty="0"/>
+              <a:t> used for control logic like loops, macros, and conditions.</a:t>
+            </a:r>
+          </a:p>
+          <a:p>
+            <a:r>
+              <a:rPr lang="en-US" sz="1800" dirty="0"/>
+              <a:t>{# ... #}: </a:t>
+            </a:r>
+            <a:r>
+              <a:rPr lang="en-US" sz="1800" b="1" dirty="0"/>
+              <a:t>Comments</a:t>
+            </a:r>
+            <a:r>
+              <a:rPr lang="en-US" sz="1800" dirty="0"/>
+              <a:t> which are completely omitted from the final output</a:t>
+            </a:r>
+          </a:p>
+          <a:p>
+            <a:r>
+              <a:rPr lang="en-US" sz="1800" dirty="0"/>
+              <a:t># ...: </a:t>
+            </a:r>
+            <a:r>
+              <a:rPr lang="en-US" sz="1800" b="1" dirty="0"/>
+              <a:t>Line statements </a:t>
+            </a:r>
+            <a:r>
+              <a:rPr lang="en-US" sz="1800" dirty="0"/>
+              <a:t>used as an alternative syntax to improve readability</a:t>
+            </a:r>
           </a:p>
         </p:txBody>
       </p:sp>
     </p:spTree>
     <p:extLst>
       <p:ext uri="{BB962C8B-B14F-4D97-AF65-F5344CB8AC3E}">
-        <p14:creationId xmlns:p14="http://schemas.microsoft.com/office/powerpoint/2010/main" val="3340870784"/>
+        <p14:creationId xmlns:p14="http://schemas.microsoft.com/office/powerpoint/2010/main" val="1969476680"/>
       </p:ext>
     </p:extLst>
   </p:cSld>
@@ -6795,7 +6791,7 @@
           <p:cNvPr id="2" name="Title 1">
             <a:extLst>
               <a:ext uri="{FF2B5EF4-FFF2-40B4-BE49-F238E27FC236}">
-                <a16:creationId xmlns:a16="http://schemas.microsoft.com/office/drawing/2014/main" id="{C4A1D942-FC58-967A-6036-8D60480E0D8E}"/>
+                <a16:creationId xmlns:a16="http://schemas.microsoft.com/office/drawing/2014/main" id="{67200482-3FE5-B16A-5B3E-2690F27C2696}"/>
               </a:ext>
             </a:extLst>
           </p:cNvPr>
@@ -6813,84 +6809,201 @@
           <a:p>
             <a:r>
               <a:rPr lang="en-US" dirty="0"/>
-              <a:t>Python </a:t>
-            </a:r>
-            <a:r>
-              <a:rPr lang="en-US" dirty="0" err="1"/>
-              <a:t>Netmiko</a:t>
-            </a:r>
-            <a:r>
-              <a:rPr lang="en-US" dirty="0"/>
-              <a:t> Library</a:t>
-            </a:r>
-          </a:p>
-        </p:txBody>
-      </p:sp>
-      <p:sp>
-        <p:nvSpPr>
-          <p:cNvPr id="3" name="Content Placeholder 2">
+              <a:t>Python NAPALM library </a:t>
+            </a:r>
+          </a:p>
+        </p:txBody>
+      </p:sp>
+      <p:sp>
+        <p:nvSpPr>
+          <p:cNvPr id="6" name="TextBox 5">
             <a:extLst>
               <a:ext uri="{FF2B5EF4-FFF2-40B4-BE49-F238E27FC236}">
-                <a16:creationId xmlns:a16="http://schemas.microsoft.com/office/drawing/2014/main" id="{BAD59433-71B5-3F71-A46A-4BCFD6B6F724}"/>
+                <a16:creationId xmlns:a16="http://schemas.microsoft.com/office/drawing/2014/main" id="{AAEC8C3B-3BD2-4945-0E11-DA5756D57CAE}"/>
               </a:ext>
             </a:extLst>
           </p:cNvPr>
-          <p:cNvSpPr>
-            <a:spLocks noGrp="1"/>
-          </p:cNvSpPr>
-          <p:nvPr>
-            <p:ph idx="1"/>
-          </p:nvPr>
-        </p:nvSpPr>
-        <p:spPr/>
-        <p:txBody>
-          <a:bodyPr/>
+          <p:cNvSpPr txBox="1"/>
+          <p:nvPr/>
+        </p:nvSpPr>
+        <p:spPr>
+          <a:xfrm>
+            <a:off x="720213" y="1891032"/>
+            <a:ext cx="9955161" cy="4847481"/>
+          </a:xfrm>
+          <a:prstGeom prst="rect">
+            <a:avLst/>
+          </a:prstGeom>
+          <a:noFill/>
+        </p:spPr>
+        <p:txBody>
+          <a:bodyPr wrap="square" rtlCol="0">
+            <a:spAutoFit/>
+          </a:bodyPr>
           <a:lstStyle/>
           <a:p>
-            <a:r>
-              <a:rPr lang="en-US" sz="1800" dirty="0"/>
-              <a:t>Successfully establish an SSH connection to the device.</a:t>
-            </a:r>
-          </a:p>
-          <a:p>
-            <a:r>
-              <a:rPr lang="en-US" sz="1800" dirty="0"/>
-              <a:t>Simplify the execution, retrieval, and formatting of show commands.</a:t>
-            </a:r>
-          </a:p>
-          <a:p>
-            <a:r>
-              <a:rPr lang="en-US" sz="1800" dirty="0"/>
-              <a:t>Simplify the execution of configuration commands.</a:t>
-            </a:r>
-          </a:p>
-          <a:p>
-            <a:r>
-              <a:rPr lang="en-US" sz="1800" dirty="0"/>
-              <a:t>Abstract away much of the low-level mechanics of interacting with devices.</a:t>
-            </a:r>
-          </a:p>
-          <a:p>
-            <a:r>
-              <a:rPr lang="en-US" sz="1800" dirty="0"/>
-              <a:t>Provide a (relatively) uniform API for interacting with devices.</a:t>
-            </a:r>
-          </a:p>
-          <a:p>
-            <a:r>
-              <a:rPr lang="en-US" sz="1800" dirty="0"/>
-              <a:t>Do the above across a broad set of networking vendors and platforms.</a:t>
-            </a:r>
-          </a:p>
-          <a:p>
+            <a:pPr marL="342900" indent="-342900">
+              <a:buFont typeface="Arial" panose="020B0604020202020204" pitchFamily="34" charset="0"/>
+              <a:buChar char="•"/>
+            </a:pPr>
+            <a:r>
+              <a:rPr lang="en-US" dirty="0"/>
+              <a:t>NAPALM (Network Automation and Programmability Abstraction Layer with Multivendor support) is a Python library that implements a set of functions to interact with different network device Operating Systems using a unified API.</a:t>
+            </a:r>
+          </a:p>
+          <a:p>
+            <a:pPr marL="342900" indent="-342900">
+              <a:buFont typeface="Arial" panose="020B0604020202020204" pitchFamily="34" charset="0"/>
+              <a:buChar char="•"/>
+            </a:pPr>
+            <a:endParaRPr lang="en-US" sz="1900" dirty="0"/>
+          </a:p>
+          <a:p>
+            <a:pPr marL="285750" indent="-285750">
+              <a:buFont typeface="Arial" panose="020B0604020202020204" pitchFamily="34" charset="0"/>
+              <a:buChar char="•"/>
+            </a:pPr>
+            <a:r>
+              <a:rPr lang="en-US" dirty="0"/>
+              <a:t>Arista EOS</a:t>
+            </a:r>
+          </a:p>
+          <a:p>
+            <a:pPr marL="285750" indent="-285750">
+              <a:buFont typeface="Arial" panose="020B0604020202020204" pitchFamily="34" charset="0"/>
+              <a:buChar char="•"/>
+            </a:pPr>
+            <a:r>
+              <a:rPr lang="en-US" dirty="0"/>
+              <a:t>Cisco IOS</a:t>
+            </a:r>
+          </a:p>
+          <a:p>
+            <a:pPr marL="285750" indent="-285750">
+              <a:buFont typeface="Arial" panose="020B0604020202020204" pitchFamily="34" charset="0"/>
+              <a:buChar char="•"/>
+            </a:pPr>
+            <a:r>
+              <a:rPr lang="en-US" dirty="0"/>
+              <a:t>Cisco IOS-XR</a:t>
+            </a:r>
+          </a:p>
+          <a:p>
+            <a:pPr marL="285750" indent="-285750">
+              <a:buFont typeface="Arial" panose="020B0604020202020204" pitchFamily="34" charset="0"/>
+              <a:buChar char="•"/>
+            </a:pPr>
+            <a:r>
+              <a:rPr lang="en-US" dirty="0"/>
+              <a:t>Cisco NX-OS</a:t>
+            </a:r>
+          </a:p>
+          <a:p>
+            <a:pPr marL="285750" indent="-285750">
+              <a:buFont typeface="Arial" panose="020B0604020202020204" pitchFamily="34" charset="0"/>
+              <a:buChar char="•"/>
+            </a:pPr>
+            <a:r>
+              <a:rPr lang="en-US" dirty="0"/>
+              <a:t>Fortinet </a:t>
+            </a:r>
+            <a:r>
+              <a:rPr lang="en-US" dirty="0" err="1"/>
+              <a:t>Fortios</a:t>
+            </a:r>
             <a:endParaRPr lang="en-US" dirty="0"/>
+          </a:p>
+          <a:p>
+            <a:pPr marL="285750" indent="-285750">
+              <a:buFont typeface="Arial" panose="020B0604020202020204" pitchFamily="34" charset="0"/>
+              <a:buChar char="•"/>
+            </a:pPr>
+            <a:r>
+              <a:rPr lang="en-US" dirty="0"/>
+              <a:t>IBM</a:t>
+            </a:r>
+          </a:p>
+          <a:p>
+            <a:pPr marL="285750" indent="-285750">
+              <a:buFont typeface="Arial" panose="020B0604020202020204" pitchFamily="34" charset="0"/>
+              <a:buChar char="•"/>
+            </a:pPr>
+            <a:r>
+              <a:rPr lang="en-US" dirty="0"/>
+              <a:t>Juniper </a:t>
+            </a:r>
+            <a:r>
+              <a:rPr lang="en-US" dirty="0" err="1"/>
+              <a:t>JunOS</a:t>
+            </a:r>
+            <a:endParaRPr lang="en-US" dirty="0"/>
+          </a:p>
+          <a:p>
+            <a:pPr marL="285750" indent="-285750">
+              <a:buFont typeface="Arial" panose="020B0604020202020204" pitchFamily="34" charset="0"/>
+              <a:buChar char="•"/>
+            </a:pPr>
+            <a:r>
+              <a:rPr lang="en-US" dirty="0" err="1"/>
+              <a:t>Mikrotik</a:t>
+            </a:r>
+            <a:r>
+              <a:rPr lang="en-US" dirty="0"/>
+              <a:t> </a:t>
+            </a:r>
+            <a:r>
+              <a:rPr lang="en-US" dirty="0" err="1"/>
+              <a:t>RouterOS</a:t>
+            </a:r>
+            <a:endParaRPr lang="en-US" dirty="0"/>
+          </a:p>
+          <a:p>
+            <a:pPr marL="285750" indent="-285750">
+              <a:buFont typeface="Arial" panose="020B0604020202020204" pitchFamily="34" charset="0"/>
+              <a:buChar char="•"/>
+            </a:pPr>
+            <a:r>
+              <a:rPr lang="en-US" dirty="0"/>
+              <a:t>Palo Alto NOS</a:t>
+            </a:r>
+          </a:p>
+          <a:p>
+            <a:pPr marL="285750" indent="-285750">
+              <a:buFont typeface="Arial" panose="020B0604020202020204" pitchFamily="34" charset="0"/>
+              <a:buChar char="•"/>
+            </a:pPr>
+            <a:r>
+              <a:rPr lang="en-US" dirty="0"/>
+              <a:t>Pluribus</a:t>
+            </a:r>
+          </a:p>
+          <a:p>
+            <a:pPr marL="285750" indent="-285750">
+              <a:buFont typeface="Arial" panose="020B0604020202020204" pitchFamily="34" charset="0"/>
+              <a:buChar char="•"/>
+            </a:pPr>
+            <a:r>
+              <a:rPr lang="en-US" dirty="0" err="1"/>
+              <a:t>Vyos</a:t>
+            </a:r>
+            <a:endParaRPr lang="en-US" dirty="0"/>
+          </a:p>
+          <a:p>
+            <a:endParaRPr lang="en-US" sz="1900" dirty="0"/>
+          </a:p>
+          <a:p>
+            <a:pPr marL="342900" indent="-342900">
+              <a:buFont typeface="Arial" panose="020B0604020202020204" pitchFamily="34" charset="0"/>
+              <a:buChar char="•"/>
+            </a:pPr>
+            <a:endParaRPr lang="en-US" sz="1900" dirty="0"/>
           </a:p>
         </p:txBody>
       </p:sp>
     </p:spTree>
     <p:extLst>
       <p:ext uri="{BB962C8B-B14F-4D97-AF65-F5344CB8AC3E}">
-        <p14:creationId xmlns:p14="http://schemas.microsoft.com/office/powerpoint/2010/main" val="3234716708"/>
+        <p14:creationId xmlns:p14="http://schemas.microsoft.com/office/powerpoint/2010/main" val="3340870784"/>
       </p:ext>
     </p:extLst>
   </p:cSld>
@@ -6901,145 +7014,6 @@
 </file>
 
 <file path=ppt/slides/slide8.xml><?xml version="1.0" encoding="utf-8"?>
-<p:sld xmlns:a="http://schemas.openxmlformats.org/drawingml/2006/main" xmlns:r="http://schemas.openxmlformats.org/officeDocument/2006/relationships" xmlns:p="http://schemas.openxmlformats.org/presentationml/2006/main">
-  <p:cSld>
-    <p:spTree>
-      <p:nvGrpSpPr>
-        <p:cNvPr id="1" name=""/>
-        <p:cNvGrpSpPr/>
-        <p:nvPr/>
-      </p:nvGrpSpPr>
-      <p:grpSpPr>
-        <a:xfrm>
-          <a:off x="0" y="0"/>
-          <a:ext cx="0" cy="0"/>
-          <a:chOff x="0" y="0"/>
-          <a:chExt cx="0" cy="0"/>
-        </a:xfrm>
-      </p:grpSpPr>
-      <p:sp>
-        <p:nvSpPr>
-          <p:cNvPr id="2" name="Title 1">
-            <a:extLst>
-              <a:ext uri="{FF2B5EF4-FFF2-40B4-BE49-F238E27FC236}">
-                <a16:creationId xmlns:a16="http://schemas.microsoft.com/office/drawing/2014/main" id="{84570EFB-D792-B2C1-0C11-3ABE932870A6}"/>
-              </a:ext>
-            </a:extLst>
-          </p:cNvPr>
-          <p:cNvSpPr>
-            <a:spLocks noGrp="1"/>
-          </p:cNvSpPr>
-          <p:nvPr>
-            <p:ph type="title"/>
-          </p:nvPr>
-        </p:nvSpPr>
-        <p:spPr/>
-        <p:txBody>
-          <a:bodyPr/>
-          <a:lstStyle/>
-          <a:p>
-            <a:r>
-              <a:rPr lang="en-US" dirty="0"/>
-              <a:t>Python </a:t>
-            </a:r>
-            <a:r>
-              <a:rPr lang="en-US" dirty="0" err="1"/>
-              <a:t>Nornir</a:t>
-            </a:r>
-            <a:r>
-              <a:rPr lang="en-US" dirty="0"/>
-              <a:t> Library</a:t>
-            </a:r>
-          </a:p>
-        </p:txBody>
-      </p:sp>
-      <p:sp>
-        <p:nvSpPr>
-          <p:cNvPr id="3" name="Content Placeholder 2">
-            <a:extLst>
-              <a:ext uri="{FF2B5EF4-FFF2-40B4-BE49-F238E27FC236}">
-                <a16:creationId xmlns:a16="http://schemas.microsoft.com/office/drawing/2014/main" id="{6E0421EA-9AC0-4893-E82E-8A81C9E0407A}"/>
-              </a:ext>
-            </a:extLst>
-          </p:cNvPr>
-          <p:cNvSpPr>
-            <a:spLocks noGrp="1"/>
-          </p:cNvSpPr>
-          <p:nvPr>
-            <p:ph idx="1"/>
-          </p:nvPr>
-        </p:nvSpPr>
-        <p:spPr/>
-        <p:txBody>
-          <a:bodyPr/>
-          <a:lstStyle/>
-          <a:p>
-            <a:r>
-              <a:rPr lang="en-US" sz="1800" dirty="0" err="1"/>
-              <a:t>Nornir</a:t>
-            </a:r>
-            <a:r>
-              <a:rPr lang="en-US" sz="1800" dirty="0"/>
-              <a:t> is an open-source, pluggable, multi-threaded automation framework written in Python and designed to be used directly with native Python code. Unlike traditional configuration management tools like Ansible, which rely on a Domain-Specific Language (DSL) or cumbersome YAML files, </a:t>
-            </a:r>
-            <a:r>
-              <a:rPr lang="en-US" sz="1800" dirty="0" err="1"/>
-              <a:t>Nornir</a:t>
-            </a:r>
-            <a:r>
-              <a:rPr lang="en-US" sz="1800" dirty="0"/>
-              <a:t> lets you orchestrate workflows using standard Python scripts.</a:t>
-            </a:r>
-          </a:p>
-          <a:p>
-            <a:endParaRPr lang="en-US" sz="1800" dirty="0"/>
-          </a:p>
-          <a:p>
-            <a:r>
-              <a:rPr lang="en-US" b="1" dirty="0"/>
-              <a:t>Pure Python Execution:</a:t>
-            </a:r>
-            <a:r>
-              <a:rPr lang="en-US" sz="1800" dirty="0"/>
-              <a:t> Write all your tasks, conditionals, loops, and logic natively in Python.</a:t>
-            </a:r>
-          </a:p>
-          <a:p>
-            <a:r>
-              <a:rPr lang="en-US" b="1" dirty="0"/>
-              <a:t>Built-in Concurrency:</a:t>
-            </a:r>
-            <a:r>
-              <a:rPr lang="en-US" sz="1800" dirty="0"/>
-              <a:t> Features a multi-threaded task runner that operates rapidly across large device inventories.</a:t>
-            </a:r>
-          </a:p>
-          <a:p>
-            <a:r>
-              <a:rPr lang="en-US" b="1" dirty="0"/>
-              <a:t>Native Inventory Management:</a:t>
-            </a:r>
-            <a:r>
-              <a:rPr lang="en-US" sz="1800" dirty="0"/>
-              <a:t> Organizes and accesses host data, variables, credentials, and custom metadata.</a:t>
-            </a:r>
-          </a:p>
-        </p:txBody>
-      </p:sp>
-    </p:spTree>
-    <p:extLst>
-      <p:ext uri="{BB962C8B-B14F-4D97-AF65-F5344CB8AC3E}">
-        <p14:creationId xmlns:p14="http://schemas.microsoft.com/office/powerpoint/2010/main" val="3067227133"/>
-      </p:ext>
-    </p:extLst>
-  </p:cSld>
-  <p:clrMapOvr>
-    <a:masterClrMapping/>
-  </p:clrMapOvr>
-</p:sld>
-</file>
-
-<file path=ppt/slides/slide9.xml><?xml version="1.0" encoding="utf-8"?>
 <p:sld xmlns:a="http://schemas.openxmlformats.org/drawingml/2006/main" xmlns:r="http://schemas.openxmlformats.org/officeDocument/2006/relationships" xmlns:p="http://schemas.openxmlformats.org/presentationml/2006/main">
   <p:cSld>
     <p:spTree>

--- a/Slides/Day-10/Python Scripting for Networking - Day 10.pptx
+++ b/Slides/Day-10/Python Scripting for Networking - Day 10.pptx
@@ -248,7 +248,7 @@
           <a:p>
             <a:fld id="{D1D1EADE-8E88-4C7C-8AC5-FB148DE4940E}" type="datetime1">
               <a:rPr lang="en-US" smtClean="0"/>
-              <a:t>7/16/2026</a:t>
+              <a:t>7/17/2026</a:t>
             </a:fld>
             <a:endParaRPr lang="en-US"/>
           </a:p>
@@ -416,7 +416,7 @@
           <a:p>
             <a:fld id="{EC3C8B9C-477D-492A-96AD-1FC2CC997A73}" type="datetime1">
               <a:rPr lang="en-US" smtClean="0"/>
-              <a:t>7/16/2026</a:t>
+              <a:t>7/17/2026</a:t>
             </a:fld>
             <a:endParaRPr lang="en-US"/>
           </a:p>
@@ -594,7 +594,7 @@
           <a:p>
             <a:fld id="{42D3AED5-E26D-4E29-B1B3-7847B6779594}" type="datetime1">
               <a:rPr lang="en-US" smtClean="0"/>
-              <a:t>7/16/2026</a:t>
+              <a:t>7/17/2026</a:t>
             </a:fld>
             <a:endParaRPr lang="en-US"/>
           </a:p>
@@ -762,7 +762,7 @@
           <a:p>
             <a:fld id="{157B6794-849E-4626-908B-D15793550EFB}" type="datetime1">
               <a:rPr lang="en-US" smtClean="0"/>
-              <a:t>7/16/2026</a:t>
+              <a:t>7/17/2026</a:t>
             </a:fld>
             <a:endParaRPr lang="en-US"/>
           </a:p>
@@ -1007,7 +1007,7 @@
           <a:p>
             <a:fld id="{63DB64E7-5594-42A3-ADBF-E95A7ACEAD64}" type="datetime1">
               <a:rPr lang="en-US" smtClean="0"/>
-              <a:t>7/16/2026</a:t>
+              <a:t>7/17/2026</a:t>
             </a:fld>
             <a:endParaRPr lang="en-US"/>
           </a:p>
@@ -1236,7 +1236,7 @@
           <a:p>
             <a:fld id="{18462B0B-D248-4FFB-8695-AD7FA4B1284A}" type="datetime1">
               <a:rPr lang="en-US" smtClean="0"/>
-              <a:t>7/16/2026</a:t>
+              <a:t>7/17/2026</a:t>
             </a:fld>
             <a:endParaRPr lang="en-US"/>
           </a:p>
@@ -1600,7 +1600,7 @@
           <a:p>
             <a:fld id="{D0378EFB-9159-4510-B73F-4F0409ADE937}" type="datetime1">
               <a:rPr lang="en-US" smtClean="0"/>
-              <a:t>7/16/2026</a:t>
+              <a:t>7/17/2026</a:t>
             </a:fld>
             <a:endParaRPr lang="en-US"/>
           </a:p>
@@ -1717,7 +1717,7 @@
           <a:p>
             <a:fld id="{89BC9412-2452-4BED-A324-9D8C115361AD}" type="datetime1">
               <a:rPr lang="en-US" smtClean="0"/>
-              <a:t>7/16/2026</a:t>
+              <a:t>7/17/2026</a:t>
             </a:fld>
             <a:endParaRPr lang="en-US"/>
           </a:p>
@@ -1812,7 +1812,7 @@
           <a:p>
             <a:fld id="{F5318F62-D251-40E8-A23C-F4CFE9FEAB41}" type="datetime1">
               <a:rPr lang="en-US" smtClean="0"/>
-              <a:t>7/16/2026</a:t>
+              <a:t>7/17/2026</a:t>
             </a:fld>
             <a:endParaRPr lang="en-US"/>
           </a:p>
@@ -2087,7 +2087,7 @@
           <a:p>
             <a:fld id="{44F76144-149E-4874-93A5-554A0357CF82}" type="datetime1">
               <a:rPr lang="en-US" smtClean="0"/>
-              <a:t>7/16/2026</a:t>
+              <a:t>7/17/2026</a:t>
             </a:fld>
             <a:endParaRPr lang="en-US"/>
           </a:p>
@@ -2342,7 +2342,7 @@
           <a:p>
             <a:fld id="{50BA65D8-0540-4835-AE5C-25D29DBA01BE}" type="datetime1">
               <a:rPr lang="en-US" smtClean="0"/>
-              <a:t>7/16/2026</a:t>
+              <a:t>7/17/2026</a:t>
             </a:fld>
             <a:endParaRPr lang="en-US"/>
           </a:p>
@@ -2553,7 +2553,7 @@
           <a:p>
             <a:fld id="{E31BA835-12AC-4E8F-955A-EA3F4DE2791F}" type="datetime1">
               <a:rPr lang="en-US" smtClean="0"/>
-              <a:t>7/16/2026</a:t>
+              <a:t>7/17/2026</a:t>
             </a:fld>
             <a:endParaRPr lang="en-US"/>
           </a:p>
